--- a/catalog/samples/harvey_ball_table.pptx
+++ b/catalog/samples/harvey_ball_table.pptx
@@ -1472,7 +1472,7 @@
           </a:p>
           <a:p>
             <a:r>
-              <a:t>  "template_sha256": "399a823dc5367517793c849dfa9a48df55666da462d928821f3ecd271f2a8001"</a:t>
+              <a:t>  "template_sha256": "e5df118a46905e9c0f9dd404c28db81cf1dbf1d753875281986ee175e242b317"</a:t>
             </a:r>
           </a:p>
           <a:p>
